--- a/team-synthesis/slides_proposal_defense.pptx
+++ b/team-synthesis/slides_proposal_defense.pptx
@@ -5923,7 +5923,7 @@
                 <a:ea typeface="Calibri" pitchFamily="34" charset="-122"/>
                 <a:cs typeface="Calibri" pitchFamily="34" charset="-120"/>
               </a:rPr>
-              <a:t>GPT-4o</a:t>
+              <a:t>Claude 4.6</a:t>
             </a:r>
             <a:endParaRPr lang="en-US" sz="1300" dirty="0"/>
           </a:p>
@@ -6462,7 +6462,7 @@
                 <a:ea typeface="Calibri" pitchFamily="34" charset="-122"/>
                 <a:cs typeface="Calibri" pitchFamily="34" charset="-120"/>
               </a:rPr>
-              <a:t>gpt-4o-2024-08-06 · temp 0 · few-shot from spec · prompt logged verbatim (pilot: Claude proxy)</a:t>
+              <a:t>claude-sonnet-4-6 · temp 0 · few-shot from spec · prompt logged verbatim (pilot + full, same model)</a:t>
             </a:r>
             <a:endParaRPr lang="en-US" sz="1350" dirty="0"/>
           </a:p>
@@ -6989,7 +6989,7 @@
                 <a:ea typeface="Calibri" pitchFamily="34" charset="-122"/>
                 <a:cs typeface="Calibri" pitchFamily="34" charset="-120"/>
               </a:rPr>
-              <a:t>Full run (GPT-4o)</a:t>
+              <a:t>Full run (Claude Sonnet 4.6)</a:t>
             </a:r>
             <a:endParaRPr lang="en-US" sz="1400" dirty="0"/>
           </a:p>
@@ -8102,7 +8102,7 @@
                 <a:ea typeface="Calibri" pitchFamily="34" charset="-122"/>
                 <a:cs typeface="Calibri" pitchFamily="34" charset="-120"/>
               </a:rPr>
-              <a:t>Blind protocol (suites built before faults; spec-only sub-agent logs) + human cohort + GPT-4o for the full run</a:t>
+              <a:t>Blind protocol (suites built before faults; spec-only sub-agent logs) + independent Manual re-authoring (a separate Claude Sonnet 4.6 session) for the full run</a:t>
             </a:r>
             <a:endParaRPr lang="en-US" sz="1300" dirty="0"/>
           </a:p>
@@ -8578,7 +8578,7 @@
                 <a:ea typeface="Calibri" pitchFamily="34" charset="-122"/>
                 <a:cs typeface="Calibri" pitchFamily="34" charset="-120"/>
               </a:rPr>
-              <a:t>Feasibility evidence — full run with GPT-4o will confirm</a:t>
+              <a:t>Feasibility evidence — full run with Claude Sonnet 4.6 will confirm</a:t>
             </a:r>
             <a:endParaRPr lang="en-US" sz="1400" dirty="0"/>
           </a:p>
@@ -8983,7 +8983,7 @@
                 <a:ea typeface="Calibri" pitchFamily="34" charset="-122"/>
                 <a:cs typeface="Calibri" pitchFamily="34" charset="-120"/>
               </a:rPr>
-              <a:t>Pilot used Claude Sonnet 4.6 as an available-model proxy; approved full run uses gpt-4o-2024-08-06.</a:t>
+              <a:t>Pilot and full run both use Claude Sonnet 4.6 (claude-sonnet-4-6) — no model swap.</a:t>
             </a:r>
             <a:endParaRPr lang="en-US" sz="1300" dirty="0"/>
           </a:p>
